--- a/output/MSS001.pptx
+++ b/output/MSS001.pptx
@@ -3602,8 +3602,8 @@
         </p:nvSpPr>
         <p:spPr>
           <a:xfrm>
-            <a:off x="228600" y="310896"/>
-            <a:ext cx="59436" cy="502920"/>
+            <a:off x="228600" y="146304"/>
+            <a:ext cx="59436" cy="786384"/>
           </a:xfrm>
           <a:prstGeom prst="rect">
             <a:avLst/>
@@ -3645,8 +3645,8 @@
         </p:nvSpPr>
         <p:spPr>
           <a:xfrm>
-            <a:off x="402336" y="274320"/>
-            <a:ext cx="8686800" cy="548640"/>
+            <a:off x="402336" y="146304"/>
+            <a:ext cx="11384280" cy="749808"/>
           </a:xfrm>
           <a:prstGeom prst="rect">
             <a:avLst/>
@@ -3663,9 +3663,18 @@
             <a:r>
               <a:rPr sz="2400" b="1">
                 <a:solidFill>
+                  <a:srgbClr val="C02026"/>
+                </a:solidFill>
+                <a:latin typeface="Oswald"/>
+              </a:rPr>
+              <a:t>CASE STUDY: </a:t>
+            </a:r>
+            <a:r>
+              <a:rPr sz="2400" b="1">
+                <a:solidFill>
                   <a:srgbClr val="111110"/>
                 </a:solidFill>
-                <a:latin typeface="Calibri"/>
+                <a:latin typeface="Oswald"/>
               </a:rPr>
               <a:t>PROCUREMENT CYCLE COMPRESSION</a:t>
             </a:r>
@@ -3680,8 +3689,8 @@
         </p:nvSpPr>
         <p:spPr>
           <a:xfrm>
-            <a:off x="402336" y="676656"/>
-            <a:ext cx="11430000" cy="310896"/>
+            <a:off x="402336" y="640080"/>
+            <a:ext cx="11384280" cy="274320"/>
           </a:xfrm>
           <a:prstGeom prst="rect">
             <a:avLst/>
@@ -3700,7 +3709,7 @@
                 <a:solidFill>
                   <a:srgbClr val="3A8B82"/>
                 </a:solidFill>
-                <a:latin typeface="Calibri"/>
+                <a:latin typeface="Oswald"/>
               </a:rPr>
               <a:t>CLIENT: Leading Manufacturing Enterprise  |  DOMAIN: Manufacturing</a:t>
             </a:r>
@@ -3823,7 +3832,7 @@
                 <a:solidFill>
                   <a:srgbClr val="111110"/>
                 </a:solidFill>
-                <a:latin typeface="Calibri"/>
+                <a:latin typeface="Helvetica"/>
               </a:rPr>
               <a:t>The Challenge</a:t>
             </a:r>
@@ -3848,7 +3857,7 @@
         </p:spPr>
         <p:txBody>
           <a:bodyPr wrap="square" tIns="0" bIns="0" lIns="0" rIns="0">
-            <a:spAutoFit/>
+            <a:normAutofit/>
           </a:bodyPr>
           <a:lstStyle/>
           <a:p>
@@ -3858,7 +3867,7 @@
                 <a:solidFill>
                   <a:srgbClr val="3E3E3E"/>
                 </a:solidFill>
-                <a:latin typeface="Calibri"/>
+                <a:latin typeface="Helvetica"/>
               </a:rPr>
               <a:t>A manufacturing company in active scale-up was running its entire procurement operation on calls, emails, and spreadsheets maintained by individual buyers. Vendor quotes arrived in different formats, approval chains had no single owner, and PO status existed only in people's heads. Fragmentation was invisible until production timelines started slipping, not because of supply failures, but because internal procurement had become the bottleneck. A missed approval or untracked PO became a line stoppage.</a:t>
             </a:r>
@@ -3981,7 +3990,7 @@
                 <a:solidFill>
                   <a:srgbClr val="111110"/>
                 </a:solidFill>
-                <a:latin typeface="Calibri"/>
+                <a:latin typeface="Helvetica"/>
               </a:rPr>
               <a:t>The Solution</a:t>
             </a:r>
@@ -4006,7 +4015,7 @@
         </p:spPr>
         <p:txBody>
           <a:bodyPr wrap="square" tIns="0" bIns="0" lIns="0" rIns="0">
-            <a:spAutoFit/>
+            <a:normAutofit/>
           </a:bodyPr>
           <a:lstStyle/>
           <a:p>
@@ -4016,7 +4025,7 @@
                 <a:solidFill>
                   <a:srgbClr val="3E3E3E"/>
                 </a:solidFill>
-                <a:latin typeface="Calibri"/>
+                <a:latin typeface="Helvetica"/>
               </a:rPr>
               <a:t>A fully digitized procure-to-pay system replaced the manual chain from indent to payment. Vendors receive structured RFQs through WhatsApp and respond in a format the system reads directly. Approval routing executes against the client's actual hierarchy without chasing. Every PO moves through a tracked lifecycle with real-time visibility at each stage. The procurement team now operates from one platform instead of a scatter of inboxes and files.</a:t>
             </a:r>
@@ -4051,7 +4060,7 @@
                 <a:solidFill>
                   <a:srgbClr val="3A8B82"/>
                 </a:solidFill>
-                <a:latin typeface="Calibri"/>
+                <a:latin typeface="Helvetica"/>
               </a:rPr>
               <a:t>Key Capabilities Developed</a:t>
             </a:r>
@@ -4131,7 +4140,7 @@
                 <a:solidFill>
                   <a:srgbClr val="111110"/>
                 </a:solidFill>
-                <a:latin typeface="Calibri"/>
+                <a:latin typeface="Helvetica"/>
               </a:rPr>
               <a:t>End-to-End Procurement Execution</a:t>
             </a:r>
@@ -4156,7 +4165,7 @@
         </p:spPr>
         <p:txBody>
           <a:bodyPr wrap="square" tIns="0" bIns="0" lIns="0" rIns="0">
-            <a:spAutoFit/>
+            <a:normAutofit/>
           </a:bodyPr>
           <a:lstStyle/>
           <a:p>
@@ -4166,9 +4175,9 @@
                 <a:solidFill>
                   <a:srgbClr val="3E3E3E"/>
                 </a:solidFill>
-                <a:latin typeface="Calibri"/>
+                <a:latin typeface="Helvetica"/>
               </a:rPr>
-              <a:t>Streamlined procurement process from request to payment</a:t>
+              <a:t>Covers the full cycle from requisition to final payment on one platform, eliminating handoff gaps between steps.</a:t>
             </a:r>
           </a:p>
         </p:txBody>
@@ -4246,7 +4255,7 @@
                 <a:solidFill>
                   <a:srgbClr val="111110"/>
                 </a:solidFill>
-                <a:latin typeface="Calibri"/>
+                <a:latin typeface="Helvetica"/>
               </a:rPr>
               <a:t>Vendor Quote Collection via WhatsApp</a:t>
             </a:r>
@@ -4271,7 +4280,7 @@
         </p:spPr>
         <p:txBody>
           <a:bodyPr wrap="square" tIns="0" bIns="0" lIns="0" rIns="0">
-            <a:spAutoFit/>
+            <a:normAutofit/>
           </a:bodyPr>
           <a:lstStyle/>
           <a:p>
@@ -4281,9 +4290,9 @@
                 <a:solidFill>
                   <a:srgbClr val="3E3E3E"/>
                 </a:solidFill>
-                <a:latin typeface="Calibri"/>
+                <a:latin typeface="Helvetica"/>
               </a:rPr>
-              <a:t>Structured RFQs sent to vendors through WhatsApp</a:t>
+              <a:t>Sends structured RFQs to suppliers and captures responses in a standard format, removing manual collation.</a:t>
             </a:r>
           </a:p>
         </p:txBody>
@@ -4361,7 +4370,7 @@
                 <a:solidFill>
                   <a:srgbClr val="111110"/>
                 </a:solidFill>
-                <a:latin typeface="Calibri"/>
+                <a:latin typeface="Helvetica"/>
               </a:rPr>
               <a:t>Automated Approval Routing</a:t>
             </a:r>
@@ -4386,7 +4395,7 @@
         </p:spPr>
         <p:txBody>
           <a:bodyPr wrap="square" tIns="0" bIns="0" lIns="0" rIns="0">
-            <a:spAutoFit/>
+            <a:normAutofit/>
           </a:bodyPr>
           <a:lstStyle/>
           <a:p>
@@ -4396,9 +4405,9 @@
                 <a:solidFill>
                   <a:srgbClr val="3E3E3E"/>
                 </a:solidFill>
-                <a:latin typeface="Calibri"/>
+                <a:latin typeface="Helvetica"/>
               </a:rPr>
-              <a:t>Automated routing based on organizational hierarchy</a:t>
+              <a:t>Configurable chains trigger and escalate automatically by value, category, and department, with no follow-up required.</a:t>
             </a:r>
           </a:p>
         </p:txBody>
@@ -4476,7 +4485,7 @@
                 <a:solidFill>
                   <a:srgbClr val="111110"/>
                 </a:solidFill>
-                <a:latin typeface="Calibri"/>
+                <a:latin typeface="Helvetica"/>
               </a:rPr>
               <a:t>Purchase Order Lifecycle Tracking</a:t>
             </a:r>
@@ -4501,7 +4510,7 @@
         </p:spPr>
         <p:txBody>
           <a:bodyPr wrap="square" tIns="0" bIns="0" lIns="0" rIns="0">
-            <a:spAutoFit/>
+            <a:normAutofit/>
           </a:bodyPr>
           <a:lstStyle/>
           <a:p>
@@ -4511,9 +4520,9 @@
                 <a:solidFill>
                   <a:srgbClr val="3E3E3E"/>
                 </a:solidFill>
-                <a:latin typeface="Calibri"/>
+                <a:latin typeface="Helvetica"/>
               </a:rPr>
-              <a:t>Real-time tracking of purchase order status</a:t>
+              <a:t>Real-time visibility from PO creation to goods receipt, so delays surface before they hit the line.</a:t>
             </a:r>
           </a:p>
         </p:txBody>
@@ -4591,7 +4600,7 @@
                 <a:solidFill>
                   <a:srgbClr val="111110"/>
                 </a:solidFill>
-                <a:latin typeface="Calibri"/>
+                <a:latin typeface="Helvetica"/>
               </a:rPr>
               <a:t>Vendor Performance Scoring</a:t>
             </a:r>
@@ -4616,7 +4625,7 @@
         </p:spPr>
         <p:txBody>
           <a:bodyPr wrap="square" tIns="0" bIns="0" lIns="0" rIns="0">
-            <a:spAutoFit/>
+            <a:normAutofit/>
           </a:bodyPr>
           <a:lstStyle/>
           <a:p>
@@ -4626,9 +4635,9 @@
                 <a:solidFill>
                   <a:srgbClr val="3E3E3E"/>
                 </a:solidFill>
-                <a:latin typeface="Calibri"/>
+                <a:latin typeface="Helvetica"/>
               </a:rPr>
-              <a:t>Evaluation of vendor performance metrics</a:t>
+              <a:t>Tracks delivery reliability, quality, and pricing trends per supplier to inform future sourcing decisions.</a:t>
             </a:r>
           </a:p>
         </p:txBody>
@@ -4706,7 +4715,7 @@
                 <a:solidFill>
                   <a:srgbClr val="111110"/>
                 </a:solidFill>
-                <a:latin typeface="Calibri"/>
+                <a:latin typeface="Helvetica"/>
               </a:rPr>
               <a:t>Spend and Savings Analytics</a:t>
             </a:r>
@@ -4731,7 +4740,7 @@
         </p:spPr>
         <p:txBody>
           <a:bodyPr wrap="square" tIns="0" bIns="0" lIns="0" rIns="0">
-            <a:spAutoFit/>
+            <a:normAutofit/>
           </a:bodyPr>
           <a:lstStyle/>
           <a:p>
@@ -4741,9 +4750,9 @@
                 <a:solidFill>
                   <a:srgbClr val="3E3E3E"/>
                 </a:solidFill>
-                <a:latin typeface="Calibri"/>
+                <a:latin typeface="Helvetica"/>
               </a:rPr>
-              <a:t>Analysis of spending patterns and savings opportunities</a:t>
+              <a:t>Aggregates procurement data into spend analysis and vendor comparisons, making cost patterns visible for the first time.</a:t>
             </a:r>
           </a:p>
         </p:txBody>
@@ -4799,8 +4808,8 @@
         </p:nvSpPr>
         <p:spPr>
           <a:xfrm>
-            <a:off x="182880" y="5614416"/>
-            <a:ext cx="3697223" cy="603504"/>
+            <a:off x="182880" y="5596128"/>
+            <a:ext cx="3697223" cy="566928"/>
           </a:xfrm>
           <a:prstGeom prst="rect">
             <a:avLst/>
@@ -4819,7 +4828,7 @@
                 <a:solidFill>
                   <a:srgbClr val="FFFFFF"/>
                 </a:solidFill>
-                <a:latin typeface="Calibri"/>
+                <a:latin typeface="Helvetica"/>
               </a:rPr>
               <a:t>70%</a:t>
             </a:r>
@@ -4834,8 +4843,8 @@
         </p:nvSpPr>
         <p:spPr>
           <a:xfrm>
-            <a:off x="137160" y="6272784"/>
-            <a:ext cx="3788664" cy="502920"/>
+            <a:off x="137160" y="6217920"/>
+            <a:ext cx="3788664" cy="585216"/>
           </a:xfrm>
           <a:prstGeom prst="rect">
             <a:avLst/>
@@ -4850,11 +4859,11 @@
           <a:p>
             <a:pPr algn="ctr"/>
             <a:r>
-              <a:rPr sz="900" b="0">
+              <a:rPr sz="1100" b="0">
                 <a:solidFill>
                   <a:srgbClr val="FFFFFF"/>
                 </a:solidFill>
-                <a:latin typeface="Calibri"/>
+                <a:latin typeface="Helvetica"/>
               </a:rPr>
               <a:t>reduction in procurement cycle time</a:t>
             </a:r>
@@ -4869,8 +4878,8 @@
         </p:nvSpPr>
         <p:spPr>
           <a:xfrm>
-            <a:off x="4245864" y="5614416"/>
-            <a:ext cx="3697223" cy="603504"/>
+            <a:off x="4245864" y="5596128"/>
+            <a:ext cx="3697223" cy="566928"/>
           </a:xfrm>
           <a:prstGeom prst="rect">
             <a:avLst/>
@@ -4889,7 +4898,7 @@
                 <a:solidFill>
                   <a:srgbClr val="FFFFFF"/>
                 </a:solidFill>
-                <a:latin typeface="Calibri"/>
+                <a:latin typeface="Helvetica"/>
               </a:rPr>
               <a:t>Automated</a:t>
             </a:r>
@@ -4904,8 +4913,8 @@
         </p:nvSpPr>
         <p:spPr>
           <a:xfrm>
-            <a:off x="4200144" y="6272784"/>
-            <a:ext cx="3788664" cy="502920"/>
+            <a:off x="4200144" y="6217920"/>
+            <a:ext cx="3788664" cy="585216"/>
           </a:xfrm>
           <a:prstGeom prst="rect">
             <a:avLst/>
@@ -4920,11 +4929,11 @@
           <a:p>
             <a:pPr algn="ctr"/>
             <a:r>
-              <a:rPr sz="900" b="0">
+              <a:rPr sz="1100" b="0">
                 <a:solidFill>
                   <a:srgbClr val="FFFFFF"/>
                 </a:solidFill>
-                <a:latin typeface="Calibri"/>
+                <a:latin typeface="Helvetica"/>
               </a:rPr>
               <a:t>approval workflows with zero manual chasing</a:t>
             </a:r>
@@ -4939,8 +4948,8 @@
         </p:nvSpPr>
         <p:spPr>
           <a:xfrm>
-            <a:off x="8308847" y="5614416"/>
-            <a:ext cx="3697223" cy="603504"/>
+            <a:off x="8308847" y="5596128"/>
+            <a:ext cx="3697223" cy="566928"/>
           </a:xfrm>
           <a:prstGeom prst="rect">
             <a:avLst/>
@@ -4959,7 +4968,7 @@
                 <a:solidFill>
                   <a:srgbClr val="FFFFFF"/>
                 </a:solidFill>
-                <a:latin typeface="Calibri"/>
+                <a:latin typeface="Helvetica"/>
               </a:rPr>
               <a:t>Single platform</a:t>
             </a:r>
@@ -4974,8 +4983,8 @@
         </p:nvSpPr>
         <p:spPr>
           <a:xfrm>
-            <a:off x="8263128" y="6272784"/>
-            <a:ext cx="3788664" cy="502920"/>
+            <a:off x="8263128" y="6217920"/>
+            <a:ext cx="3788664" cy="585216"/>
           </a:xfrm>
           <a:prstGeom prst="rect">
             <a:avLst/>
@@ -4990,11 +4999,11 @@
           <a:p>
             <a:pPr algn="ctr"/>
             <a:r>
-              <a:rPr sz="900" b="0">
+              <a:rPr sz="1100" b="0">
                 <a:solidFill>
                   <a:srgbClr val="FFFFFF"/>
                 </a:solidFill>
-                <a:latin typeface="Calibri"/>
+                <a:latin typeface="Helvetica"/>
               </a:rPr>
               <a:t>indent-to-payment visibility</a:t>
             </a:r>
